--- a/22011P0524 - koushik prc.pptx
+++ b/22011P0524 - koushik prc.pptx
@@ -125,6 +125,91 @@
     </p:ext>
   </p:extLst>
 </p:presentation>
+</file>
+
+<file path=ppt/revisionInfo.xml><?xml version="1.0" encoding="utf-8"?>
+<p1510:revInfo xmlns:a="http://schemas.openxmlformats.org/drawingml/2006/main" xmlns:r="http://schemas.openxmlformats.org/officeDocument/2006/relationships" xmlns:p1510="http://schemas.microsoft.com/office/powerpoint/2015/10/main">
+  <p1510:revLst>
+    <p1510:client id="{74851BE4-6A26-4EE1-A95C-B547894460CA}" v="1" dt="2026-08-26T15:18:30.196"/>
+  </p1510:revLst>
+</p1510:revInfo>
+</file>
+
+<file path=ppt/changesInfos/changesInfo1.xml><?xml version="1.0" encoding="utf-8"?>
+<pc:chgInfo xmlns:a="http://schemas.openxmlformats.org/drawingml/2006/main" xmlns:r="http://schemas.openxmlformats.org/officeDocument/2006/relationships" xmlns:ac="http://schemas.microsoft.com/office/drawing/2013/main/command" xmlns:pc="http://schemas.microsoft.com/office/powerpoint/2013/main/command">
+  <pc:docChgLst>
+    <pc:chgData name="Sai Koushik Marelly" userId="9aefc5a058bce651" providerId="LiveId" clId="{5187D578-BB9C-4EE0-8E34-6CD3EA027384}"/>
+    <pc:docChg chg="custSel modSld">
+      <pc:chgData name="Sai Koushik Marelly" userId="9aefc5a058bce651" providerId="LiveId" clId="{5187D578-BB9C-4EE0-8E34-6CD3EA027384}" dt="2026-08-26T15:22:59.358" v="252" actId="14100"/>
+      <pc:docMkLst>
+        <pc:docMk/>
+      </pc:docMkLst>
+      <pc:sldChg chg="modSp mod">
+        <pc:chgData name="Sai Koushik Marelly" userId="9aefc5a058bce651" providerId="LiveId" clId="{5187D578-BB9C-4EE0-8E34-6CD3EA027384}" dt="2026-08-26T15:22:59.358" v="252" actId="14100"/>
+        <pc:sldMkLst>
+          <pc:docMk/>
+          <pc:sldMk cId="0" sldId="274"/>
+        </pc:sldMkLst>
+        <pc:spChg chg="mod">
+          <ac:chgData name="Sai Koushik Marelly" userId="9aefc5a058bce651" providerId="LiveId" clId="{5187D578-BB9C-4EE0-8E34-6CD3EA027384}" dt="2026-08-26T15:15:24.936" v="104" actId="14100"/>
+          <ac:spMkLst>
+            <pc:docMk/>
+            <pc:sldMk cId="0" sldId="274"/>
+            <ac:spMk id="5" creationId="{00000000-0000-0000-0000-000000000000}"/>
+          </ac:spMkLst>
+        </pc:spChg>
+        <pc:spChg chg="mod">
+          <ac:chgData name="Sai Koushik Marelly" userId="9aefc5a058bce651" providerId="LiveId" clId="{5187D578-BB9C-4EE0-8E34-6CD3EA027384}" dt="2026-08-26T15:22:59.358" v="252" actId="14100"/>
+          <ac:spMkLst>
+            <pc:docMk/>
+            <pc:sldMk cId="0" sldId="274"/>
+            <ac:spMk id="6" creationId="{00000000-0000-0000-0000-000000000000}"/>
+          </ac:spMkLst>
+        </pc:spChg>
+        <pc:spChg chg="mod">
+          <ac:chgData name="Sai Koushik Marelly" userId="9aefc5a058bce651" providerId="LiveId" clId="{5187D578-BB9C-4EE0-8E34-6CD3EA027384}" dt="2026-08-26T15:18:54.403" v="200" actId="1076"/>
+          <ac:spMkLst>
+            <pc:docMk/>
+            <pc:sldMk cId="0" sldId="274"/>
+            <ac:spMk id="8" creationId="{00000000-0000-0000-0000-000000000000}"/>
+          </ac:spMkLst>
+        </pc:spChg>
+        <pc:spChg chg="mod">
+          <ac:chgData name="Sai Koushik Marelly" userId="9aefc5a058bce651" providerId="LiveId" clId="{5187D578-BB9C-4EE0-8E34-6CD3EA027384}" dt="2026-08-26T15:20:54.449" v="247" actId="1076"/>
+          <ac:spMkLst>
+            <pc:docMk/>
+            <pc:sldMk cId="0" sldId="274"/>
+            <ac:spMk id="9" creationId="{00000000-0000-0000-0000-000000000000}"/>
+          </ac:spMkLst>
+        </pc:spChg>
+        <pc:spChg chg="mod">
+          <ac:chgData name="Sai Koushik Marelly" userId="9aefc5a058bce651" providerId="LiveId" clId="{5187D578-BB9C-4EE0-8E34-6CD3EA027384}" dt="2026-08-26T15:12:00.469" v="34" actId="1076"/>
+          <ac:spMkLst>
+            <pc:docMk/>
+            <pc:sldMk cId="0" sldId="274"/>
+            <ac:spMk id="11" creationId="{00000000-0000-0000-0000-000000000000}"/>
+          </ac:spMkLst>
+        </pc:spChg>
+        <pc:spChg chg="mod">
+          <ac:chgData name="Sai Koushik Marelly" userId="9aefc5a058bce651" providerId="LiveId" clId="{5187D578-BB9C-4EE0-8E34-6CD3EA027384}" dt="2026-08-26T15:21:29.298" v="248" actId="1076"/>
+          <ac:spMkLst>
+            <pc:docMk/>
+            <pc:sldMk cId="0" sldId="274"/>
+            <ac:spMk id="12" creationId="{53776431-15AA-1516-B792-BD67F0FF28E3}"/>
+          </ac:spMkLst>
+        </pc:spChg>
+        <pc:picChg chg="mod">
+          <ac:chgData name="Sai Koushik Marelly" userId="9aefc5a058bce651" providerId="LiveId" clId="{5187D578-BB9C-4EE0-8E34-6CD3EA027384}" dt="2026-08-26T15:12:22.496" v="36" actId="14100"/>
+          <ac:picMkLst>
+            <pc:docMk/>
+            <pc:sldMk cId="0" sldId="274"/>
+            <ac:picMk id="3" creationId="{00000000-0000-0000-0000-000000000000}"/>
+          </ac:picMkLst>
+        </pc:picChg>
+      </pc:sldChg>
+    </pc:docChg>
+  </pc:docChgLst>
+</pc:chgInfo>
 </file>
 
 <file path=ppt/notesMasters/notesMaster1.xml><?xml version="1.0" encoding="utf-8"?>
@@ -2053,8 +2138,8 @@
         </p:blipFill>
         <p:spPr>
           <a:xfrm>
-            <a:off x="10452847" y="199100"/>
-            <a:ext cx="1738848" cy="1622926"/>
+            <a:off x="9611" y="710"/>
+            <a:ext cx="2416836" cy="1965657"/>
           </a:xfrm>
           <a:prstGeom prst="rect">
             <a:avLst/>
@@ -2097,8 +2182,8 @@
         </p:nvSpPr>
         <p:spPr>
           <a:xfrm>
-            <a:off x="1217672" y="2347608"/>
-            <a:ext cx="9572252" cy="1426723"/>
+            <a:off x="9611" y="1832002"/>
+            <a:ext cx="12191695" cy="2493280"/>
           </a:xfrm>
           <a:prstGeom prst="rect">
             <a:avLst/>
@@ -2129,8 +2214,8 @@
         </p:nvSpPr>
         <p:spPr>
           <a:xfrm>
-            <a:off x="1217672" y="2416748"/>
-            <a:ext cx="9756656" cy="1143000"/>
+            <a:off x="370540" y="2771676"/>
+            <a:ext cx="11689977" cy="963328"/>
           </a:xfrm>
           <a:prstGeom prst="rect">
             <a:avLst/>
@@ -2142,60 +2227,22 @@
           <a:bodyPr wrap="square" rtlCol="0" anchor="ctr"/>
           <a:lstStyle/>
           <a:p>
-            <a:pPr marL="0" indent="0" algn="ctr">
-              <a:buNone/>
-            </a:pPr>
+            <a:pPr algn="ctr"/>
             <a:r>
               <a:rPr lang="en-US" sz="2400" b="1" kern="0" spc="50" dirty="0">
                 <a:solidFill>
-                  <a:srgbClr val="7030A0"/>
+                  <a:schemeClr val="accent1">
+                    <a:lumMod val="75000"/>
+                  </a:schemeClr>
                 </a:solidFill>
                 <a:latin typeface="Times New Roman" panose="02020603050405020304" pitchFamily="18" charset="0"/>
                 <a:ea typeface="Georgia" pitchFamily="34" charset="-122"/>
                 <a:cs typeface="Times New Roman" panose="02020603050405020304" pitchFamily="18" charset="0"/>
               </a:rPr>
-              <a:t>Title of the </a:t>
-            </a:r>
-            <a:r>
-              <a:rPr lang="en-IN" sz="2400" b="1" kern="0" spc="50" dirty="0">
-                <a:solidFill>
-                  <a:srgbClr val="7030A0"/>
-                </a:solidFill>
-                <a:latin typeface="Times New Roman" panose="02020603050405020304" pitchFamily="18" charset="0"/>
-                <a:ea typeface="Georgia" pitchFamily="34" charset="-122"/>
-                <a:cs typeface="Times New Roman" panose="02020603050405020304" pitchFamily="18" charset="0"/>
-              </a:rPr>
-              <a:t>Dissertation Work</a:t>
-            </a:r>
-            <a:r>
-              <a:rPr lang="en-US" sz="2400" b="1" kern="0" spc="50" dirty="0">
-                <a:solidFill>
-                  <a:srgbClr val="7030A0"/>
-                </a:solidFill>
-                <a:latin typeface="Times New Roman" panose="02020603050405020304" pitchFamily="18" charset="0"/>
-                <a:ea typeface="Georgia" pitchFamily="34" charset="-122"/>
-                <a:cs typeface="Times New Roman" panose="02020603050405020304" pitchFamily="18" charset="0"/>
-              </a:rPr>
-              <a:t> : </a:t>
-            </a:r>
-          </a:p>
-          <a:p>
-            <a:pPr algn="ctr"/>
-            <a:r>
-              <a:rPr lang="en-US" sz="2400" b="1" kern="0" spc="50" dirty="0">
-                <a:solidFill>
-                  <a:schemeClr val="accent1">
-                    <a:lumMod val="75000"/>
-                  </a:schemeClr>
-                </a:solidFill>
-                <a:latin typeface="Times New Roman" panose="02020603050405020304" pitchFamily="18" charset="0"/>
-                <a:ea typeface="Georgia" pitchFamily="34" charset="-122"/>
-                <a:cs typeface="Times New Roman" panose="02020603050405020304" pitchFamily="18" charset="0"/>
-              </a:rPr>
               <a:t>“</a:t>
             </a:r>
             <a:r>
-              <a:rPr lang="en-US" sz="2400" b="1" i="1" dirty="0">
+              <a:rPr lang="en-US" sz="2800" b="1" i="1" dirty="0">
                 <a:solidFill>
                   <a:srgbClr val="142850"/>
                 </a:solidFill>
@@ -2205,12 +2252,12 @@
               </a:rPr>
               <a:t>ORCA — A Reliable, Quality-Validated Backend Pipeline for</a:t>
             </a:r>
-            <a:endParaRPr lang="en-US" dirty="0"/>
+            <a:endParaRPr lang="en-US" sz="2000" dirty="0"/>
           </a:p>
           <a:p>
             <a:pPr algn="ctr"/>
             <a:r>
-              <a:rPr lang="en-US" sz="2400" b="1" i="1" dirty="0">
+              <a:rPr lang="en-US" sz="2800" b="1" i="1" dirty="0">
                 <a:solidFill>
                   <a:srgbClr val="142850"/>
                 </a:solidFill>
@@ -2253,8 +2300,8 @@
         </p:nvSpPr>
         <p:spPr>
           <a:xfrm>
-            <a:off x="1160661" y="4091363"/>
-            <a:ext cx="3239134" cy="1143000"/>
+            <a:off x="762337" y="4709670"/>
+            <a:ext cx="3239134" cy="1259194"/>
           </a:xfrm>
           <a:prstGeom prst="rect">
             <a:avLst/>
@@ -2275,7 +2322,7 @@
             <a:r>
               <a:rPr lang="en-US" sz="1600" b="1" dirty="0">
                 <a:solidFill>
-                  <a:srgbClr val="FF0000"/>
+                  <a:srgbClr val="C00000"/>
                 </a:solidFill>
                 <a:latin typeface="Times New Roman" panose="02020603050405020304" pitchFamily="18" charset="0"/>
                 <a:ea typeface="Georgia" pitchFamily="34" charset="-122"/>
@@ -2316,7 +2363,45 @@
                 <a:ea typeface="Georgia" pitchFamily="34" charset="-122"/>
                 <a:cs typeface="Times New Roman" panose="02020603050405020304" pitchFamily="18" charset="0"/>
               </a:rPr>
-              <a:t>M. Sai Koushik - 22011P0524
+              <a:t>M. Sai Koushik (22011P0524)</a:t>
+            </a:r>
+          </a:p>
+          <a:p>
+            <a:pPr marL="0" indent="0">
+              <a:lnSpc>
+                <a:spcPct val="100000"/>
+              </a:lnSpc>
+              <a:buNone/>
+            </a:pPr>
+            <a:r>
+              <a:rPr lang="en-US" sz="1400" dirty="0">
+                <a:solidFill>
+                  <a:srgbClr val="222222"/>
+                </a:solidFill>
+                <a:latin typeface="Times New Roman" panose="02020603050405020304" pitchFamily="18" charset="0"/>
+                <a:ea typeface="Georgia" pitchFamily="34" charset="-122"/>
+                <a:cs typeface="Times New Roman" panose="02020603050405020304" pitchFamily="18" charset="0"/>
+              </a:rPr>
+              <a:t>B.Tech-IDP, 5th Year I Semester</a:t>
+            </a:r>
+          </a:p>
+          <a:p>
+            <a:pPr marL="0" indent="0">
+              <a:lnSpc>
+                <a:spcPct val="100000"/>
+              </a:lnSpc>
+              <a:buNone/>
+            </a:pPr>
+            <a:r>
+              <a:rPr lang="en-US" sz="1400" dirty="0">
+                <a:solidFill>
+                  <a:srgbClr val="222222"/>
+                </a:solidFill>
+                <a:latin typeface="Times New Roman" panose="02020603050405020304" pitchFamily="18" charset="0"/>
+                <a:ea typeface="Georgia" pitchFamily="34" charset="-122"/>
+                <a:cs typeface="Times New Roman" panose="02020603050405020304" pitchFamily="18" charset="0"/>
+              </a:rPr>
+              <a:t>CSE, JNTUH UCEH
 </a:t>
             </a:r>
             <a:endParaRPr lang="en-US" sz="1400" dirty="0">
@@ -2334,8 +2419,8 @@
         </p:nvSpPr>
         <p:spPr>
           <a:xfrm>
-            <a:off x="8992094" y="4091363"/>
-            <a:ext cx="2317671" cy="1143000"/>
+            <a:off x="9063812" y="4709670"/>
+            <a:ext cx="2317671" cy="1357664"/>
           </a:xfrm>
           <a:prstGeom prst="rect">
             <a:avLst/>
@@ -2356,7 +2441,7 @@
             <a:r>
               <a:rPr lang="en-US" sz="1600" b="1" dirty="0">
                 <a:solidFill>
-                  <a:srgbClr val="FF0000"/>
+                  <a:srgbClr val="C00000"/>
                 </a:solidFill>
                 <a:latin typeface="Times New Roman" panose="02020603050405020304" pitchFamily="18" charset="0"/>
                 <a:ea typeface="Georgia" pitchFamily="34" charset="-122"/>
@@ -2393,7 +2478,7 @@
                 <a:ea typeface="Georgia" pitchFamily="34" charset="-122"/>
                 <a:cs typeface="Times New Roman" panose="02020603050405020304" pitchFamily="18" charset="0"/>
               </a:rPr>
-              <a:t> Dr. J. Ujwala Rekha</a:t>
+              <a:t> </a:t>
             </a:r>
             <a:r>
               <a:rPr lang="en-US" sz="1400" dirty="0">
@@ -2404,7 +2489,45 @@
                 <a:ea typeface="Georgia" pitchFamily="34" charset="-122"/>
                 <a:cs typeface="Times New Roman" panose="02020603050405020304" pitchFamily="18" charset="0"/>
               </a:rPr>
-              <a:t>
+              <a:t>DR. J. UJWALA REKHA</a:t>
+            </a:r>
+          </a:p>
+          <a:p>
+            <a:pPr marL="0" indent="0">
+              <a:lnSpc>
+                <a:spcPct val="110000"/>
+              </a:lnSpc>
+              <a:buNone/>
+            </a:pPr>
+            <a:r>
+              <a:rPr lang="en-US" sz="1400" dirty="0">
+                <a:solidFill>
+                  <a:srgbClr val="222222"/>
+                </a:solidFill>
+                <a:latin typeface="Times New Roman" panose="02020603050405020304" pitchFamily="18" charset="0"/>
+                <a:ea typeface="Georgia" pitchFamily="34" charset="-122"/>
+                <a:cs typeface="Times New Roman" panose="02020603050405020304" pitchFamily="18" charset="0"/>
+              </a:rPr>
+              <a:t>Professor, CSE</a:t>
+            </a:r>
+          </a:p>
+          <a:p>
+            <a:pPr marL="0" indent="0">
+              <a:lnSpc>
+                <a:spcPct val="110000"/>
+              </a:lnSpc>
+              <a:buNone/>
+            </a:pPr>
+            <a:r>
+              <a:rPr lang="en-US" sz="1400" dirty="0">
+                <a:solidFill>
+                  <a:srgbClr val="222222"/>
+                </a:solidFill>
+                <a:latin typeface="Times New Roman" panose="02020603050405020304" pitchFamily="18" charset="0"/>
+                <a:ea typeface="Georgia" pitchFamily="34" charset="-122"/>
+                <a:cs typeface="Times New Roman" panose="02020603050405020304" pitchFamily="18" charset="0"/>
+              </a:rPr>
+              <a:t>JNTUH UCEH
 </a:t>
             </a:r>
             <a:endParaRPr lang="en-US" sz="1400" dirty="0">
@@ -2422,8 +2545,8 @@
         </p:nvSpPr>
         <p:spPr>
           <a:xfrm>
-            <a:off x="971238" y="1479432"/>
-            <a:ext cx="9701340" cy="555300"/>
+            <a:off x="2262375" y="2025423"/>
+            <a:ext cx="8144531" cy="555300"/>
           </a:xfrm>
           <a:prstGeom prst="rect">
             <a:avLst/>
@@ -2437,53 +2560,17 @@
           <a:p>
             <a:pPr algn="ctr"/>
             <a:r>
-              <a:rPr lang="en-US" sz="2400" b="1" dirty="0">
+              <a:rPr lang="en-IN" sz="2400" b="1" dirty="0">
                 <a:solidFill>
                   <a:schemeClr val="accent1">
                     <a:lumMod val="75000"/>
                   </a:schemeClr>
                 </a:solidFill>
-                <a:latin typeface="Times New Roman" panose="02020603050405020304" pitchFamily="18" charset="0"/>
-                <a:cs typeface="Times New Roman" panose="02020603050405020304" pitchFamily="18" charset="0"/>
-              </a:rPr>
-              <a:t>Vth Year IDP </a:t>
-            </a:r>
-            <a:r>
-              <a:rPr lang="en-US" sz="2400" b="1" dirty="0">
-                <a:solidFill>
-                  <a:schemeClr val="accent1">
-                    <a:lumMod val="75000"/>
-                  </a:schemeClr>
-                </a:solidFill>
-                <a:latin typeface="Calibri" pitchFamily="34" charset="0"/>
+                <a:latin typeface="Bookman Old Style" panose="02050604050505020204" pitchFamily="18" charset="0"/>
                 <a:ea typeface="Calibri" pitchFamily="34" charset="-122"/>
                 <a:cs typeface="Calibri" pitchFamily="34" charset="-120"/>
               </a:rPr>
-              <a:t>—</a:t>
-            </a:r>
-            <a:r>
-              <a:rPr lang="en-US" sz="2400" b="1" dirty="0">
-                <a:solidFill>
-                  <a:srgbClr val="B8860B"/>
-                </a:solidFill>
-                <a:latin typeface="Calibri" pitchFamily="34" charset="0"/>
-                <a:ea typeface="Calibri" pitchFamily="34" charset="-122"/>
-                <a:cs typeface="Calibri" pitchFamily="34" charset="-120"/>
-              </a:rPr>
-              <a:t> </a:t>
-            </a:r>
-            <a:r>
-              <a:rPr lang="en-IN" sz="2400" b="1" dirty="0">
-                <a:solidFill>
-                  <a:schemeClr val="accent1">
-                    <a:lumMod val="75000"/>
-                  </a:schemeClr>
-                </a:solidFill>
-                <a:latin typeface="Calibri" pitchFamily="34" charset="0"/>
-                <a:ea typeface="Calibri" pitchFamily="34" charset="-122"/>
-                <a:cs typeface="Calibri" pitchFamily="34" charset="-120"/>
-              </a:rPr>
-              <a:t>DISSERTATION WORK  |  REVIEW 1</a:t>
+              <a:t>DISSERTATION WORK REVIEW I</a:t>
             </a:r>
             <a:endParaRPr lang="en-US" sz="2400" b="1" dirty="0">
               <a:solidFill>
@@ -2491,7 +2578,7 @@
                   <a:lumMod val="75000"/>
                 </a:schemeClr>
               </a:solidFill>
-              <a:latin typeface="Times New Roman" panose="02020603050405020304" pitchFamily="18" charset="0"/>
+              <a:latin typeface="Bookman Old Style" panose="02050604050505020204" pitchFamily="18" charset="0"/>
               <a:cs typeface="Times New Roman" panose="02020603050405020304" pitchFamily="18" charset="0"/>
             </a:endParaRPr>
           </a:p>
@@ -2511,8 +2598,8 @@
         </p:nvSpPr>
         <p:spPr>
           <a:xfrm>
-            <a:off x="-6414" y="328326"/>
-            <a:ext cx="10796338" cy="1015663"/>
+            <a:off x="1426810" y="218718"/>
+            <a:ext cx="9664907" cy="1107996"/>
           </a:xfrm>
           <a:prstGeom prst="rect">
             <a:avLst/>
@@ -2527,9 +2614,9 @@
           <a:p>
             <a:pPr algn="ctr"/>
             <a:r>
-              <a:rPr lang="en-IN" sz="2000" b="1" dirty="0">
-                <a:solidFill>
-                  <a:srgbClr val="FF33CC"/>
+              <a:rPr lang="en-IN" b="1" dirty="0">
+                <a:solidFill>
+                  <a:srgbClr val="C00000"/>
                 </a:solidFill>
                 <a:latin typeface="Times New Roman" panose="02020603050405020304" pitchFamily="18" charset="0"/>
                 <a:cs typeface="Times New Roman" panose="02020603050405020304" pitchFamily="18" charset="0"/>
@@ -2540,7 +2627,10 @@
           <a:p>
             <a:pPr algn="ctr"/>
             <a:r>
-              <a:rPr lang="en-IN" sz="2000" b="1" dirty="0">
+              <a:rPr lang="en-IN" b="1" dirty="0">
+                <a:solidFill>
+                  <a:srgbClr val="FF0000"/>
+                </a:solidFill>
                 <a:latin typeface="Times New Roman" panose="02020603050405020304" pitchFamily="18" charset="0"/>
                 <a:cs typeface="Times New Roman" panose="02020603050405020304" pitchFamily="18" charset="0"/>
               </a:rPr>
@@ -2550,11 +2640,30 @@
           <a:p>
             <a:pPr algn="ctr"/>
             <a:r>
-              <a:rPr lang="en-IN" sz="2000" b="1" dirty="0">
+              <a:rPr lang="en-IN" sz="1600" b="1" dirty="0">
+                <a:solidFill>
+                  <a:srgbClr val="002060"/>
+                </a:solidFill>
                 <a:latin typeface="Times New Roman" panose="02020603050405020304" pitchFamily="18" charset="0"/>
                 <a:cs typeface="Times New Roman" panose="02020603050405020304" pitchFamily="18" charset="0"/>
               </a:rPr>
-              <a:t>UNIVERSITY COLLEGE OF ENGINEERING,SCIENCE &amp; TECHNOLOGY HYDERABAD</a:t>
+              <a:t>UNIVERSITY COLLEGE OF ENGINEERING HYDERABAD</a:t>
+            </a:r>
+          </a:p>
+          <a:p>
+            <a:pPr algn="ctr"/>
+            <a:r>
+              <a:rPr lang="en-IN" sz="1400" dirty="0">
+                <a:solidFill>
+                  <a:schemeClr val="tx1">
+                    <a:lumMod val="85000"/>
+                    <a:lumOff val="15000"/>
+                  </a:schemeClr>
+                </a:solidFill>
+                <a:latin typeface="Times New Roman" panose="02020603050405020304" pitchFamily="18" charset="0"/>
+                <a:cs typeface="Times New Roman" panose="02020603050405020304" pitchFamily="18" charset="0"/>
+              </a:rPr>
+              <a:t>Kukatpally ,Hyderabad ,Telangana(India) – 500 085.</a:t>
             </a:r>
           </a:p>
         </p:txBody>
